--- a/CSDS/A/CSDS-A-A9/13.Review_2_PPT.pptx
+++ b/CSDS/A/CSDS-A-A9/13.Review_2_PPT.pptx
@@ -1686,7 +1686,7 @@
           <a:lstStyle/>
           <a:p>
             <a:r>
-              <a:t>All planned features run. The open items are a real LLM, real data, a privacy accountant and a signed ledger.</a:t>
+              <a:t>All planned features and studies are done. The engineering items for the next stage are a privacy accountant, a signed ledger and authentication.</a:t>
             </a:r>
           </a:p>
         </p:txBody>
@@ -1772,7 +1772,7 @@
           <a:lstStyle/>
           <a:p>
             <a:r>
-              <a:t>At sigma 3 the attack is already near chance before removal (0.52 +/- 0.22), so there is little to remove. Without noise the attack is near-perfect and removal brings it to about 0.54. A fresh-noise retrain is as far from the unlearned model as two retrains are from each other: 875 versus 881 at sigma 3. At sigma 0.1 the useful model has AUC 0.86 before and 0.55 after.</a:t>
+              <a:t>At sigma 3 the attack is already near chance before removal (0.52 +/- 0.22), so there is little to remove. Without noise the attack is near-perfect and removal brings it to about 0.54. A fresh-noise retrain is as far from the unlearned model as two retrains are from each other: 875 versus 881 at sigma 3. At sigma 0.1 the useful model has AUC 0.86 before and 0.55 after. The neural adapter study (8 synthetic clients, GRU with 14,272-parameter adapters) shows the same: client-level AUC 0.78 before, 0.53 after removal, 0.53 for a fresh retrain; sigma 4.85 with 100-sentence clients needs about 1,000 clients for a useful model.</a:t>
             </a:r>
           </a:p>
         </p:txBody>
@@ -1944,7 +1944,7 @@
           <a:lstStyle/>
           <a:p>
             <a:r>
-              <a:t>Edge cases that returned the intended 400/404: unlearn before training, unknown client, malformed JSON, repeat removal, last client. Latency measured on an i5-12500 with a single client; the numbers shift between runs.</a:t>
+              <a:t>Load: 1, 2, 4, 8, 16, 32 and 64 concurrent clients on 127.0.0.1 against health, state, generate and a mixed train/unlearn workload. Security: 58 synthetic malicious or malformed requests, classified as handled, noteworthy or defect. Acceptance: 20 randomised Playwright journeys (desktop and 390 px phone, light and dark, some cancelling the first dialog). Latency measured on an i5-12500; the numbers shift between runs.</a:t>
             </a:r>
           </a:p>
         </p:txBody>
@@ -2030,7 +2030,7 @@
           <a:lstStyle/>
           <a:p>
             <a:r>
-              <a:t>Six findings from the measurement suite, each backed by experiments/*/metrics.json and docs/REPORT_FACTS.md.</a:t>
+              <a:t>Six findings from the measurement suite and the testing studies, each backed by experiments/*/metrics.json and docs/REPORT_FACTS.md. The positive result that goes with them: epsilon below 1 and a useful model coexist once the federation is large (about 1,000 clients on the synthetic corpus).</a:t>
             </a:r>
           </a:p>
         </p:txBody>
@@ -2116,7 +2116,7 @@
           <a:lstStyle/>
           <a:p>
             <a:r>
-              <a:t>Planned work, not yet done.</a:t>
+              <a:t>Engineering items for the final stage; each follows from a measured finding in the challenges slide. The exact analytic Gaussian value was computed for the report with the Balle and Wang calibration.</a:t>
             </a:r>
           </a:p>
         </p:txBody>
@@ -2632,7 +2632,7 @@
           <a:lstStyle/>
           <a:p>
             <a:r>
-              <a:t>All data is the built-in synthetic corpus in certified_unlearning/dataset.py. Every raw update norm (25.2 to 28.2) exceeds C, so all five updates are clipped.</a:t>
+              <a:t>Three synthetic data sources: the product's built-in corpus (certified_unlearning/dataset.py), a seeded 20-domain grammar corpus for the real engine, and a seeded 8-domain corpus for the neural study. In the product every raw update norm (25.2 to 28.2) exceeds C, so all five updates are clipped.</a:t>
             </a:r>
           </a:p>
         </p:txBody>
@@ -2718,7 +2718,7 @@
           <a:lstStyle/>
           <a:p>
             <a:r>
-              <a:t>Preparation turns each client's sentences into one clipped 1,089-number update. The noise standard deviation is 75 per coordinate while a clipped update has norm 25, so the noise dominates at the default setting.</a:t>
+              <a:t>Preparation turns each client's sentences into one clipped update. In the product the noise standard deviation is 75 per coordinate while a clipped update has norm 25, so the noise dominates at the default setting. On 200-sentence clients the raw update norm is about 1,239 and the product's C = 25 scales every update by 0.02; the synthetic-corpus and neural studies therefore set C to the median raw norm.</a:t>
             </a:r>
           </a:p>
         </p:txBody>
@@ -2804,7 +2804,7 @@
           <a:lstStyle/>
           <a:p>
             <a:r>
-              <a:t>The abstract speaks of federated LLMs; the implemented model is a bigram language model whose parameter vector stands in for an adapter update. Orchestration and verification are separated from the model so a real adapter can replace it later.</a:t>
+              <a:t>The product's model is a bigram language model whose parameter vector stands in for an adapter update. The neural study applies the same clip, noisy-sum and subtraction steps to the adapter parameters of a small GRU (137,151 parameters, rank-64 adapters of 14,272 parameters) trained on synthetic text; it ran in about four minutes on the CPU.</a:t>
             </a:r>
           </a:p>
         </p:txBody>
@@ -2890,7 +2890,7 @@
           <a:lstStyle/>
           <a:p>
             <a:r>
-              <a:t>Epsilon = sqrt(2 ln(1.25/delta)) / sigma. The classical Gaussian bound is valid only for epsilon &lt; 1, which needs sigma above 4.845; the default sigma = 3 is outside that range.</a:t>
+              <a:t>Epsilon = sqrt(2 ln(1.25/delta)) / sigma. The classical Gaussian bound is valid only for epsilon &lt; 1, which needs sigma above 4.845; the product's default sigma = 3 is outside that range. Because the noise is added once to the sum and divided by n, a larger federation dilutes it: on the synthetic corpus (100 sentences per client, C = median norm) the perplexity falls to within 1.2x of the noise-free model from about 1,000 clients at sigma 4.85.</a:t>
             </a:r>
           </a:p>
         </p:txBody>
@@ -6699,7 +6699,7 @@
                         <a:buNone/>
                       </a:pPr>
                       <a:r>
-                        <a:rPr lang="en-US" sz="1300" b="1" dirty="0">
+                        <a:rPr lang="en-US" sz="1200" b="1" dirty="0">
                           <a:solidFill>
                             <a:srgbClr val="FFFFFF"/>
                           </a:solidFill>
@@ -6709,7 +6709,7 @@
                         </a:rPr>
                         <a:t>Component</a:t>
                       </a:r>
-                      <a:endParaRPr lang="en-US" sz="1300" dirty="0">
+                      <a:endParaRPr lang="en-US" sz="1200" dirty="0">
                         <a:latin typeface="Calibri" charset="0"/>
                         <a:ea typeface="Calibri" charset="0"/>
                         <a:cs typeface="Calibri" charset="0"/>
@@ -6767,7 +6767,7 @@
                         <a:buNone/>
                       </a:pPr>
                       <a:r>
-                        <a:rPr lang="en-US" sz="1300" b="1" dirty="0">
+                        <a:rPr lang="en-US" sz="1200" b="1" dirty="0">
                           <a:solidFill>
                             <a:srgbClr val="FFFFFF"/>
                           </a:solidFill>
@@ -6777,7 +6777,7 @@
                         </a:rPr>
                         <a:t>Status</a:t>
                       </a:r>
-                      <a:endParaRPr lang="en-US" sz="1300" dirty="0">
+                      <a:endParaRPr lang="en-US" sz="1200" dirty="0">
                         <a:latin typeface="Calibri" charset="0"/>
                         <a:ea typeface="Calibri" charset="0"/>
                         <a:cs typeface="Calibri" charset="0"/>
@@ -6837,7 +6837,7 @@
                         <a:buNone/>
                       </a:pPr>
                       <a:r>
-                        <a:rPr lang="en-US" sz="1300" dirty="0">
+                        <a:rPr lang="en-US" sz="1200" dirty="0">
                           <a:solidFill>
                             <a:srgbClr val="0F172A"/>
                           </a:solidFill>
@@ -6847,7 +6847,7 @@
                         </a:rPr>
                         <a:t>Federated training with clipping and noise</a:t>
                       </a:r>
-                      <a:endParaRPr lang="en-US" sz="1300" dirty="0">
+                      <a:endParaRPr lang="en-US" sz="1200" dirty="0">
                         <a:latin typeface="Calibri" charset="0"/>
                         <a:ea typeface="Calibri" charset="0"/>
                         <a:cs typeface="Calibri" charset="0"/>
@@ -6905,7 +6905,7 @@
                         <a:buNone/>
                       </a:pPr>
                       <a:r>
-                        <a:rPr lang="en-US" sz="1300" dirty="0">
+                        <a:rPr lang="en-US" sz="1200" dirty="0">
                           <a:solidFill>
                             <a:srgbClr val="0F172A"/>
                           </a:solidFill>
@@ -6915,7 +6915,7 @@
                         </a:rPr>
                         <a:t>Completed</a:t>
                       </a:r>
-                      <a:endParaRPr lang="en-US" sz="1300" dirty="0">
+                      <a:endParaRPr lang="en-US" sz="1200" dirty="0">
                         <a:latin typeface="Calibri" charset="0"/>
                         <a:ea typeface="Calibri" charset="0"/>
                         <a:cs typeface="Calibri" charset="0"/>
@@ -6975,7 +6975,7 @@
                         <a:buNone/>
                       </a:pPr>
                       <a:r>
-                        <a:rPr lang="en-US" sz="1300" dirty="0">
+                        <a:rPr lang="en-US" sz="1200" dirty="0">
                           <a:solidFill>
                             <a:srgbClr val="0F172A"/>
                           </a:solidFill>
@@ -6985,7 +6985,7 @@
                         </a:rPr>
                         <a:t>Tracked-update unlearning and certificate</a:t>
                       </a:r>
-                      <a:endParaRPr lang="en-US" sz="1300" dirty="0">
+                      <a:endParaRPr lang="en-US" sz="1200" dirty="0">
                         <a:latin typeface="Calibri" charset="0"/>
                         <a:ea typeface="Calibri" charset="0"/>
                         <a:cs typeface="Calibri" charset="0"/>
@@ -7043,7 +7043,7 @@
                         <a:buNone/>
                       </a:pPr>
                       <a:r>
-                        <a:rPr lang="en-US" sz="1300" dirty="0">
+                        <a:rPr lang="en-US" sz="1200" dirty="0">
                           <a:solidFill>
                             <a:srgbClr val="0F172A"/>
                           </a:solidFill>
@@ -7053,7 +7053,7 @@
                         </a:rPr>
                         <a:t>Completed</a:t>
                       </a:r>
-                      <a:endParaRPr lang="en-US" sz="1300" dirty="0">
+                      <a:endParaRPr lang="en-US" sz="1200" dirty="0">
                         <a:latin typeface="Calibri" charset="0"/>
                         <a:ea typeface="Calibri" charset="0"/>
                         <a:cs typeface="Calibri" charset="0"/>
@@ -7113,7 +7113,7 @@
                         <a:buNone/>
                       </a:pPr>
                       <a:r>
-                        <a:rPr lang="en-US" sz="1300" dirty="0">
+                        <a:rPr lang="en-US" sz="1200" dirty="0">
                           <a:solidFill>
                             <a:srgbClr val="0F172A"/>
                           </a:solidFill>
@@ -7123,7 +7123,7 @@
                         </a:rPr>
                         <a:t>Membership attack and utility metrics</a:t>
                       </a:r>
-                      <a:endParaRPr lang="en-US" sz="1300" dirty="0">
+                      <a:endParaRPr lang="en-US" sz="1200" dirty="0">
                         <a:latin typeface="Calibri" charset="0"/>
                         <a:ea typeface="Calibri" charset="0"/>
                         <a:cs typeface="Calibri" charset="0"/>
@@ -7181,7 +7181,7 @@
                         <a:buNone/>
                       </a:pPr>
                       <a:r>
-                        <a:rPr lang="en-US" sz="1300" dirty="0">
+                        <a:rPr lang="en-US" sz="1200" dirty="0">
                           <a:solidFill>
                             <a:srgbClr val="0F172A"/>
                           </a:solidFill>
@@ -7191,7 +7191,7 @@
                         </a:rPr>
                         <a:t>Completed</a:t>
                       </a:r>
-                      <a:endParaRPr lang="en-US" sz="1300" dirty="0">
+                      <a:endParaRPr lang="en-US" sz="1200" dirty="0">
                         <a:latin typeface="Calibri" charset="0"/>
                         <a:ea typeface="Calibri" charset="0"/>
                         <a:cs typeface="Calibri" charset="0"/>
@@ -7251,7 +7251,7 @@
                         <a:buNone/>
                       </a:pPr>
                       <a:r>
-                        <a:rPr lang="en-US" sz="1300" dirty="0">
+                        <a:rPr lang="en-US" sz="1200" dirty="0">
                           <a:solidFill>
                             <a:srgbClr val="0F172A"/>
                           </a:solidFill>
@@ -7261,7 +7261,7 @@
                         </a:rPr>
                         <a:t>SHA-256 ledger with verification</a:t>
                       </a:r>
-                      <a:endParaRPr lang="en-US" sz="1300" dirty="0">
+                      <a:endParaRPr lang="en-US" sz="1200" dirty="0">
                         <a:latin typeface="Calibri" charset="0"/>
                         <a:ea typeface="Calibri" charset="0"/>
                         <a:cs typeface="Calibri" charset="0"/>
@@ -7319,7 +7319,7 @@
                         <a:buNone/>
                       </a:pPr>
                       <a:r>
-                        <a:rPr lang="en-US" sz="1300" dirty="0">
+                        <a:rPr lang="en-US" sz="1200" dirty="0">
                           <a:solidFill>
                             <a:srgbClr val="0F172A"/>
                           </a:solidFill>
@@ -7329,7 +7329,7 @@
                         </a:rPr>
                         <a:t>Completed</a:t>
                       </a:r>
-                      <a:endParaRPr lang="en-US" sz="1300" dirty="0">
+                      <a:endParaRPr lang="en-US" sz="1200" dirty="0">
                         <a:latin typeface="Calibri" charset="0"/>
                         <a:ea typeface="Calibri" charset="0"/>
                         <a:cs typeface="Calibri" charset="0"/>
@@ -7389,7 +7389,7 @@
                         <a:buNone/>
                       </a:pPr>
                       <a:r>
-                        <a:rPr lang="en-US" sz="1300" dirty="0">
+                        <a:rPr lang="en-US" sz="1200" dirty="0">
                           <a:solidFill>
                             <a:srgbClr val="0F172A"/>
                           </a:solidFill>
@@ -7399,7 +7399,7 @@
                         </a:rPr>
                         <a:t>React UI (landing + 5 screens), legacy UI, Tkinter, CLI</a:t>
                       </a:r>
-                      <a:endParaRPr lang="en-US" sz="1300" dirty="0">
+                      <a:endParaRPr lang="en-US" sz="1200" dirty="0">
                         <a:latin typeface="Calibri" charset="0"/>
                         <a:ea typeface="Calibri" charset="0"/>
                         <a:cs typeface="Calibri" charset="0"/>
@@ -7457,7 +7457,7 @@
                         <a:buNone/>
                       </a:pPr>
                       <a:r>
-                        <a:rPr lang="en-US" sz="1300" dirty="0">
+                        <a:rPr lang="en-US" sz="1200" dirty="0">
                           <a:solidFill>
                             <a:srgbClr val="0F172A"/>
                           </a:solidFill>
@@ -7467,7 +7467,7 @@
                         </a:rPr>
                         <a:t>Completed</a:t>
                       </a:r>
-                      <a:endParaRPr lang="en-US" sz="1300" dirty="0">
+                      <a:endParaRPr lang="en-US" sz="1200" dirty="0">
                         <a:latin typeface="Calibri" charset="0"/>
                         <a:ea typeface="Calibri" charset="0"/>
                         <a:cs typeface="Calibri" charset="0"/>
@@ -7527,7 +7527,7 @@
                         <a:buNone/>
                       </a:pPr>
                       <a:r>
-                        <a:rPr lang="en-US" sz="1300" dirty="0">
+                        <a:rPr lang="en-US" sz="1200" dirty="0">
                           <a:solidFill>
                             <a:srgbClr val="0F172A"/>
                           </a:solidFill>
@@ -7535,9 +7535,9 @@
                           <a:ea typeface="Calibri" pitchFamily="34" charset="-122"/>
                           <a:cs typeface="Calibri" pitchFamily="34" charset="-120"/>
                         </a:rPr>
-                        <a:t>Measurement suite: 11 experiments, 12 charts</a:t>
+                        <a:t>Product measurements: 11 experiments, 12 charts</a:t>
                       </a:r>
-                      <a:endParaRPr lang="en-US" sz="1300" dirty="0">
+                      <a:endParaRPr lang="en-US" sz="1200" dirty="0">
                         <a:latin typeface="Calibri" charset="0"/>
                         <a:ea typeface="Calibri" charset="0"/>
                         <a:cs typeface="Calibri" charset="0"/>
@@ -7595,7 +7595,7 @@
                         <a:buNone/>
                       </a:pPr>
                       <a:r>
-                        <a:rPr lang="en-US" sz="1300" dirty="0">
+                        <a:rPr lang="en-US" sz="1200" dirty="0">
                           <a:solidFill>
                             <a:srgbClr val="0F172A"/>
                           </a:solidFill>
@@ -7605,7 +7605,7 @@
                         </a:rPr>
                         <a:t>Completed</a:t>
                       </a:r>
-                      <a:endParaRPr lang="en-US" sz="1300" dirty="0">
+                      <a:endParaRPr lang="en-US" sz="1200" dirty="0">
                         <a:latin typeface="Calibri" charset="0"/>
                         <a:ea typeface="Calibri" charset="0"/>
                         <a:cs typeface="Calibri" charset="0"/>
@@ -7665,7 +7665,7 @@
                         <a:buNone/>
                       </a:pPr>
                       <a:r>
-                        <a:rPr lang="en-US" sz="1300" dirty="0">
+                        <a:rPr lang="en-US" sz="1200" dirty="0">
                           <a:solidFill>
                             <a:srgbClr val="0F172A"/>
                           </a:solidFill>
@@ -7673,9 +7673,9 @@
                           <a:ea typeface="Calibri" pitchFamily="34" charset="-122"/>
                           <a:cs typeface="Calibri" pitchFamily="34" charset="-120"/>
                         </a:rPr>
-                        <a:t>Real LLM adapter, real datasets, privacy accountant, signed ledger</a:t>
+                        <a:t>Synthetic-corpus and neural-adapter studies</a:t>
                       </a:r>
-                      <a:endParaRPr lang="en-US" sz="1300" dirty="0">
+                      <a:endParaRPr lang="en-US" sz="1200" dirty="0">
                         <a:latin typeface="Calibri" charset="0"/>
                         <a:ea typeface="Calibri" charset="0"/>
                         <a:cs typeface="Calibri" charset="0"/>
@@ -7733,7 +7733,7 @@
                         <a:buNone/>
                       </a:pPr>
                       <a:r>
-                        <a:rPr lang="en-US" sz="1300" dirty="0">
+                        <a:rPr lang="en-US" sz="1200" dirty="0">
                           <a:solidFill>
                             <a:srgbClr val="0F172A"/>
                           </a:solidFill>
@@ -7741,9 +7741,9 @@
                           <a:ea typeface="Calibri" pitchFamily="34" charset="-122"/>
                           <a:cs typeface="Calibri" pitchFamily="34" charset="-120"/>
                         </a:rPr>
-                        <a:t>Not done</a:t>
+                        <a:t>Completed</a:t>
                       </a:r>
-                      <a:endParaRPr lang="en-US" sz="1300" dirty="0">
+                      <a:endParaRPr lang="en-US" sz="1200" dirty="0">
                         <a:latin typeface="Calibri" charset="0"/>
                         <a:ea typeface="Calibri" charset="0"/>
                         <a:cs typeface="Calibri" charset="0"/>
@@ -7789,6 +7789,282 @@
                     </a:lnB>
                     <a:solidFill>
                       <a:srgbClr val="FFFFFF"/>
+                    </a:solidFill>
+                  </a:tcPr>
+                </a:tc>
+              </a:tr>
+              <a:tr h="512064">
+                <a:tc>
+                  <a:txBody>
+                    <a:bodyPr/>
+                    <a:lstStyle/>
+                    <a:p>
+                      <a:pPr indent="0" marL="0">
+                        <a:buNone/>
+                      </a:pPr>
+                      <a:r>
+                        <a:rPr lang="en-US" sz="1200" dirty="0">
+                          <a:solidFill>
+                            <a:srgbClr val="0F172A"/>
+                          </a:solidFill>
+                          <a:latin typeface="Calibri" pitchFamily="34" charset="0"/>
+                          <a:ea typeface="Calibri" pitchFamily="34" charset="-122"/>
+                          <a:cs typeface="Calibri" pitchFamily="34" charset="-120"/>
+                        </a:rPr>
+                        <a:t>Load, security-probe and acceptance studies</a:t>
+                      </a:r>
+                      <a:endParaRPr lang="en-US" sz="1200" dirty="0">
+                        <a:latin typeface="Calibri" charset="0"/>
+                        <a:ea typeface="Calibri" charset="0"/>
+                        <a:cs typeface="Calibri" charset="0"/>
+                      </a:endParaRPr>
+                    </a:p>
+                  </a:txBody>
+                  <a:tcPr marL="76200" marR="76200" marT="38100" marB="38100" anchor="ctr">
+                    <a:lnL w="6350" cap="flat" cmpd="sng" algn="ctr">
+                      <a:solidFill>
+                        <a:srgbClr val="D5DCE6"/>
+                      </a:solidFill>
+                      <a:prstDash val="solid"/>
+                      <a:round/>
+                      <a:headEnd type="none" w="med" len="med"/>
+                      <a:tailEnd type="none" w="med" len="med"/>
+                    </a:lnL>
+                    <a:lnR w="6350" cap="flat" cmpd="sng" algn="ctr">
+                      <a:solidFill>
+                        <a:srgbClr val="D5DCE6"/>
+                      </a:solidFill>
+                      <a:prstDash val="solid"/>
+                      <a:round/>
+                      <a:headEnd type="none" w="med" len="med"/>
+                      <a:tailEnd type="none" w="med" len="med"/>
+                    </a:lnR>
+                    <a:lnT w="6350" cap="flat" cmpd="sng" algn="ctr">
+                      <a:solidFill>
+                        <a:srgbClr val="D5DCE6"/>
+                      </a:solidFill>
+                      <a:prstDash val="solid"/>
+                      <a:round/>
+                      <a:headEnd type="none" w="med" len="med"/>
+                      <a:tailEnd type="none" w="med" len="med"/>
+                    </a:lnT>
+                    <a:lnB w="6350" cap="flat" cmpd="sng" algn="ctr">
+                      <a:solidFill>
+                        <a:srgbClr val="D5DCE6"/>
+                      </a:solidFill>
+                      <a:prstDash val="solid"/>
+                      <a:round/>
+                      <a:headEnd type="none" w="med" len="med"/>
+                      <a:tailEnd type="none" w="med" len="med"/>
+                    </a:lnB>
+                    <a:solidFill>
+                      <a:srgbClr val="F6F8FB"/>
+                    </a:solidFill>
+                  </a:tcPr>
+                </a:tc>
+                <a:tc>
+                  <a:txBody>
+                    <a:bodyPr/>
+                    <a:lstStyle/>
+                    <a:p>
+                      <a:pPr indent="0" marL="0">
+                        <a:buNone/>
+                      </a:pPr>
+                      <a:r>
+                        <a:rPr lang="en-US" sz="1200" dirty="0">
+                          <a:solidFill>
+                            <a:srgbClr val="0F172A"/>
+                          </a:solidFill>
+                          <a:latin typeface="Calibri" pitchFamily="34" charset="0"/>
+                          <a:ea typeface="Calibri" pitchFamily="34" charset="-122"/>
+                          <a:cs typeface="Calibri" pitchFamily="34" charset="-120"/>
+                        </a:rPr>
+                        <a:t>Completed</a:t>
+                      </a:r>
+                      <a:endParaRPr lang="en-US" sz="1200" dirty="0">
+                        <a:latin typeface="Calibri" charset="0"/>
+                        <a:ea typeface="Calibri" charset="0"/>
+                        <a:cs typeface="Calibri" charset="0"/>
+                      </a:endParaRPr>
+                    </a:p>
+                  </a:txBody>
+                  <a:tcPr marL="76200" marR="76200" marT="38100" marB="38100" anchor="ctr">
+                    <a:lnL w="6350" cap="flat" cmpd="sng" algn="ctr">
+                      <a:solidFill>
+                        <a:srgbClr val="D5DCE6"/>
+                      </a:solidFill>
+                      <a:prstDash val="solid"/>
+                      <a:round/>
+                      <a:headEnd type="none" w="med" len="med"/>
+                      <a:tailEnd type="none" w="med" len="med"/>
+                    </a:lnL>
+                    <a:lnR w="6350" cap="flat" cmpd="sng" algn="ctr">
+                      <a:solidFill>
+                        <a:srgbClr val="D5DCE6"/>
+                      </a:solidFill>
+                      <a:prstDash val="solid"/>
+                      <a:round/>
+                      <a:headEnd type="none" w="med" len="med"/>
+                      <a:tailEnd type="none" w="med" len="med"/>
+                    </a:lnR>
+                    <a:lnT w="6350" cap="flat" cmpd="sng" algn="ctr">
+                      <a:solidFill>
+                        <a:srgbClr val="D5DCE6"/>
+                      </a:solidFill>
+                      <a:prstDash val="solid"/>
+                      <a:round/>
+                      <a:headEnd type="none" w="med" len="med"/>
+                      <a:tailEnd type="none" w="med" len="med"/>
+                    </a:lnT>
+                    <a:lnB w="6350" cap="flat" cmpd="sng" algn="ctr">
+                      <a:solidFill>
+                        <a:srgbClr val="D5DCE6"/>
+                      </a:solidFill>
+                      <a:prstDash val="solid"/>
+                      <a:round/>
+                      <a:headEnd type="none" w="med" len="med"/>
+                      <a:tailEnd type="none" w="med" len="med"/>
+                    </a:lnB>
+                    <a:solidFill>
+                      <a:srgbClr val="F6F8FB"/>
+                    </a:solidFill>
+                  </a:tcPr>
+                </a:tc>
+              </a:tr>
+              <a:tr h="512064">
+                <a:tc>
+                  <a:txBody>
+                    <a:bodyPr/>
+                    <a:lstStyle/>
+                    <a:p>
+                      <a:pPr indent="0" marL="0">
+                        <a:buNone/>
+                      </a:pPr>
+                      <a:r>
+                        <a:rPr lang="en-US" sz="1200" dirty="0">
+                          <a:solidFill>
+                            <a:srgbClr val="0F172A"/>
+                          </a:solidFill>
+                          <a:latin typeface="Calibri" pitchFamily="34" charset="0"/>
+                          <a:ea typeface="Calibri" pitchFamily="34" charset="-122"/>
+                          <a:cs typeface="Calibri" pitchFamily="34" charset="-120"/>
+                        </a:rPr>
+                        <a:t>Privacy accountant, signed ledger, authentication</a:t>
+                      </a:r>
+                      <a:endParaRPr lang="en-US" sz="1200" dirty="0">
+                        <a:latin typeface="Calibri" charset="0"/>
+                        <a:ea typeface="Calibri" charset="0"/>
+                        <a:cs typeface="Calibri" charset="0"/>
+                      </a:endParaRPr>
+                    </a:p>
+                  </a:txBody>
+                  <a:tcPr marL="76200" marR="76200" marT="38100" marB="38100" anchor="ctr">
+                    <a:lnL w="6350" cap="flat" cmpd="sng" algn="ctr">
+                      <a:solidFill>
+                        <a:srgbClr val="D5DCE6"/>
+                      </a:solidFill>
+                      <a:prstDash val="solid"/>
+                      <a:round/>
+                      <a:headEnd type="none" w="med" len="med"/>
+                      <a:tailEnd type="none" w="med" len="med"/>
+                    </a:lnL>
+                    <a:lnR w="6350" cap="flat" cmpd="sng" algn="ctr">
+                      <a:solidFill>
+                        <a:srgbClr val="D5DCE6"/>
+                      </a:solidFill>
+                      <a:prstDash val="solid"/>
+                      <a:round/>
+                      <a:headEnd type="none" w="med" len="med"/>
+                      <a:tailEnd type="none" w="med" len="med"/>
+                    </a:lnR>
+                    <a:lnT w="6350" cap="flat" cmpd="sng" algn="ctr">
+                      <a:solidFill>
+                        <a:srgbClr val="D5DCE6"/>
+                      </a:solidFill>
+                      <a:prstDash val="solid"/>
+                      <a:round/>
+                      <a:headEnd type="none" w="med" len="med"/>
+                      <a:tailEnd type="none" w="med" len="med"/>
+                    </a:lnT>
+                    <a:lnB w="6350" cap="flat" cmpd="sng" algn="ctr">
+                      <a:solidFill>
+                        <a:srgbClr val="D5DCE6"/>
+                      </a:solidFill>
+                      <a:prstDash val="solid"/>
+                      <a:round/>
+                      <a:headEnd type="none" w="med" len="med"/>
+                      <a:tailEnd type="none" w="med" len="med"/>
+                    </a:lnB>
+                    <a:solidFill>
+                      <a:srgbClr val="F6F8FB"/>
+                    </a:solidFill>
+                  </a:tcPr>
+                </a:tc>
+                <a:tc>
+                  <a:txBody>
+                    <a:bodyPr/>
+                    <a:lstStyle/>
+                    <a:p>
+                      <a:pPr indent="0" marL="0">
+                        <a:buNone/>
+                      </a:pPr>
+                      <a:r>
+                        <a:rPr lang="en-US" sz="1200" dirty="0">
+                          <a:solidFill>
+                            <a:srgbClr val="0F172A"/>
+                          </a:solidFill>
+                          <a:latin typeface="Calibri" pitchFamily="34" charset="0"/>
+                          <a:ea typeface="Calibri" pitchFamily="34" charset="-122"/>
+                          <a:cs typeface="Calibri" pitchFamily="34" charset="-120"/>
+                        </a:rPr>
+                        <a:t>Planned</a:t>
+                      </a:r>
+                      <a:endParaRPr lang="en-US" sz="1200" dirty="0">
+                        <a:latin typeface="Calibri" charset="0"/>
+                        <a:ea typeface="Calibri" charset="0"/>
+                        <a:cs typeface="Calibri" charset="0"/>
+                      </a:endParaRPr>
+                    </a:p>
+                  </a:txBody>
+                  <a:tcPr marL="76200" marR="76200" marT="38100" marB="38100" anchor="ctr">
+                    <a:lnL w="6350" cap="flat" cmpd="sng" algn="ctr">
+                      <a:solidFill>
+                        <a:srgbClr val="D5DCE6"/>
+                      </a:solidFill>
+                      <a:prstDash val="solid"/>
+                      <a:round/>
+                      <a:headEnd type="none" w="med" len="med"/>
+                      <a:tailEnd type="none" w="med" len="med"/>
+                    </a:lnL>
+                    <a:lnR w="6350" cap="flat" cmpd="sng" algn="ctr">
+                      <a:solidFill>
+                        <a:srgbClr val="D5DCE6"/>
+                      </a:solidFill>
+                      <a:prstDash val="solid"/>
+                      <a:round/>
+                      <a:headEnd type="none" w="med" len="med"/>
+                      <a:tailEnd type="none" w="med" len="med"/>
+                    </a:lnR>
+                    <a:lnT w="6350" cap="flat" cmpd="sng" algn="ctr">
+                      <a:solidFill>
+                        <a:srgbClr val="D5DCE6"/>
+                      </a:solidFill>
+                      <a:prstDash val="solid"/>
+                      <a:round/>
+                      <a:headEnd type="none" w="med" len="med"/>
+                      <a:tailEnd type="none" w="med" len="med"/>
+                    </a:lnT>
+                    <a:lnB w="6350" cap="flat" cmpd="sng" algn="ctr">
+                      <a:solidFill>
+                        <a:srgbClr val="D5DCE6"/>
+                      </a:solidFill>
+                      <a:prstDash val="solid"/>
+                      <a:round/>
+                      <a:headEnd type="none" w="med" len="med"/>
+                      <a:tailEnd type="none" w="med" len="med"/>
+                    </a:lnB>
+                    <a:solidFill>
+                      <a:srgbClr val="F6F8FB"/>
                     </a:solidFill>
                   </a:tcPr>
                 </a:tc>
@@ -8345,7 +8621,7 @@
                   <a:srgbClr val="475569"/>
                 </a:solidFill>
               </a:rPr>
-              <a:t>attack AUC with no noise, before → after removal</a:t>
+              <a:t>bigram attack AUC with no noise, before → after removal</a:t>
             </a:r>
             <a:endParaRPr lang="en-US" sz="1300" dirty="0"/>
           </a:p>
@@ -8415,7 +8691,7 @@
                 <a:ea typeface="Cambria" pitchFamily="34" charset="-122"/>
                 <a:cs typeface="Cambria" pitchFamily="34" charset="-120"/>
               </a:rPr>
-              <a:t>142</a:t>
+              <a:t>0.78 → 0.53</a:t>
             </a:r>
             <a:endParaRPr lang="en-US" sz="3600" dirty="0"/>
           </a:p>
@@ -8451,7 +8727,7 @@
                   <a:srgbClr val="475569"/>
                 </a:solidFill>
               </a:rPr>
-              <a:t>perplexity at sigma 3 (uniform model = 32)</a:t>
+              <a:t>neural adapters, client-level AUC (fresh retrain 0.53)</a:t>
             </a:r>
             <a:endParaRPr lang="en-US" sz="1300" dirty="0"/>
           </a:p>
@@ -8521,7 +8797,7 @@
                 <a:ea typeface="Cambria" pitchFamily="34" charset="-122"/>
                 <a:cs typeface="Cambria" pitchFamily="34" charset="-120"/>
               </a:rPr>
-              <a:t>250/250</a:t>
+              <a:t>1,000</a:t>
             </a:r>
             <a:endParaRPr lang="en-US" sz="3600" dirty="0"/>
           </a:p>
@@ -8557,7 +8833,7 @@
                   <a:srgbClr val="475569"/>
                 </a:solidFill>
               </a:rPr>
-              <a:t>requests certified (50 seeds x 5 clients)</a:t>
+              <a:t>clients for epsilon &lt; 1 with a useful model (synthetic corpus)</a:t>
             </a:r>
             <a:endParaRPr lang="en-US" sz="1300" dirty="0"/>
           </a:p>
@@ -8986,8 +9262,8 @@
             <a:tbl>
               <a:tblPr/>
               <a:tblGrid>
-                <a:gridCol w="2560320"/>
-                <a:gridCol w="614476"/>
+                <a:gridCol w="2150668"/>
+                <a:gridCol w="1024128"/>
                 <a:gridCol w="1945843"/>
               </a:tblGrid>
               <a:tr h="502920">
@@ -9000,7 +9276,7 @@
                         <a:buNone/>
                       </a:pPr>
                       <a:r>
-                        <a:rPr lang="en-US" sz="1200" b="1" dirty="0">
+                        <a:rPr lang="en-US" sz="1400" b="1" dirty="0">
                           <a:solidFill>
                             <a:srgbClr val="FFFFFF"/>
                           </a:solidFill>
@@ -9010,7 +9286,7 @@
                         </a:rPr>
                         <a:t>Test group</a:t>
                       </a:r>
-                      <a:endParaRPr lang="en-US" sz="1200" dirty="0">
+                      <a:endParaRPr lang="en-US" sz="1400" dirty="0">
                         <a:latin typeface="Calibri" charset="0"/>
                         <a:ea typeface="Calibri" charset="0"/>
                         <a:cs typeface="Calibri" charset="0"/>
@@ -9068,7 +9344,7 @@
                         <a:buNone/>
                       </a:pPr>
                       <a:r>
-                        <a:rPr lang="en-US" sz="1200" b="1" dirty="0">
+                        <a:rPr lang="en-US" sz="1400" b="1" dirty="0">
                           <a:solidFill>
                             <a:srgbClr val="FFFFFF"/>
                           </a:solidFill>
@@ -9078,7 +9354,7 @@
                         </a:rPr>
                         <a:t>Count</a:t>
                       </a:r>
-                      <a:endParaRPr lang="en-US" sz="1200" dirty="0">
+                      <a:endParaRPr lang="en-US" sz="1400" dirty="0">
                         <a:latin typeface="Calibri" charset="0"/>
                         <a:ea typeface="Calibri" charset="0"/>
                         <a:cs typeface="Calibri" charset="0"/>
@@ -9136,7 +9412,7 @@
                         <a:buNone/>
                       </a:pPr>
                       <a:r>
-                        <a:rPr lang="en-US" sz="1200" b="1" dirty="0">
+                        <a:rPr lang="en-US" sz="1400" b="1" dirty="0">
                           <a:solidFill>
                             <a:srgbClr val="FFFFFF"/>
                           </a:solidFill>
@@ -9146,7 +9422,7 @@
                         </a:rPr>
                         <a:t>Result</a:t>
                       </a:r>
-                      <a:endParaRPr lang="en-US" sz="1200" dirty="0">
+                      <a:endParaRPr lang="en-US" sz="1400" dirty="0">
                         <a:latin typeface="Calibri" charset="0"/>
                         <a:ea typeface="Calibri" charset="0"/>
                         <a:cs typeface="Calibri" charset="0"/>
@@ -9206,7 +9482,7 @@
                         <a:buNone/>
                       </a:pPr>
                       <a:r>
-                        <a:rPr lang="en-US" sz="1200" dirty="0">
+                        <a:rPr lang="en-US" sz="1400" dirty="0">
                           <a:solidFill>
                             <a:srgbClr val="0F172A"/>
                           </a:solidFill>
@@ -9216,7 +9492,7 @@
                         </a:rPr>
                         <a:t>Unit tests (unittest)</a:t>
                       </a:r>
-                      <a:endParaRPr lang="en-US" sz="1200" dirty="0">
+                      <a:endParaRPr lang="en-US" sz="1400" dirty="0">
                         <a:latin typeface="Calibri" charset="0"/>
                         <a:ea typeface="Calibri" charset="0"/>
                         <a:cs typeface="Calibri" charset="0"/>
@@ -9274,7 +9550,7 @@
                         <a:buNone/>
                       </a:pPr>
                       <a:r>
-                        <a:rPr lang="en-US" sz="1200" dirty="0">
+                        <a:rPr lang="en-US" sz="1400" dirty="0">
                           <a:solidFill>
                             <a:srgbClr val="0F172A"/>
                           </a:solidFill>
@@ -9284,7 +9560,7 @@
                         </a:rPr>
                         <a:t>5</a:t>
                       </a:r>
-                      <a:endParaRPr lang="en-US" sz="1200" dirty="0">
+                      <a:endParaRPr lang="en-US" sz="1400" dirty="0">
                         <a:latin typeface="Calibri" charset="0"/>
                         <a:ea typeface="Calibri" charset="0"/>
                         <a:cs typeface="Calibri" charset="0"/>
@@ -9342,7 +9618,7 @@
                         <a:buNone/>
                       </a:pPr>
                       <a:r>
-                        <a:rPr lang="en-US" sz="1200" dirty="0">
+                        <a:rPr lang="en-US" sz="1400" dirty="0">
                           <a:solidFill>
                             <a:srgbClr val="0F172A"/>
                           </a:solidFill>
@@ -9352,7 +9628,7 @@
                         </a:rPr>
                         <a:t>5 passed</a:t>
                       </a:r>
-                      <a:endParaRPr lang="en-US" sz="1200" dirty="0">
+                      <a:endParaRPr lang="en-US" sz="1400" dirty="0">
                         <a:latin typeface="Calibri" charset="0"/>
                         <a:ea typeface="Calibri" charset="0"/>
                         <a:cs typeface="Calibri" charset="0"/>
@@ -9412,7 +9688,7 @@
                         <a:buNone/>
                       </a:pPr>
                       <a:r>
-                        <a:rPr lang="en-US" sz="1200" dirty="0">
+                        <a:rPr lang="en-US" sz="1400" dirty="0">
                           <a:solidFill>
                             <a:srgbClr val="0F172A"/>
                           </a:solidFill>
@@ -9422,7 +9698,7 @@
                         </a:rPr>
                         <a:t>Smoke test on the live API</a:t>
                       </a:r>
-                      <a:endParaRPr lang="en-US" sz="1200" dirty="0">
+                      <a:endParaRPr lang="en-US" sz="1400" dirty="0">
                         <a:latin typeface="Calibri" charset="0"/>
                         <a:ea typeface="Calibri" charset="0"/>
                         <a:cs typeface="Calibri" charset="0"/>
@@ -9480,7 +9756,7 @@
                         <a:buNone/>
                       </a:pPr>
                       <a:r>
-                        <a:rPr lang="en-US" sz="1200" dirty="0">
+                        <a:rPr lang="en-US" sz="1400" dirty="0">
                           <a:solidFill>
                             <a:srgbClr val="0F172A"/>
                           </a:solidFill>
@@ -9490,7 +9766,7 @@
                         </a:rPr>
                         <a:t>14</a:t>
                       </a:r>
-                      <a:endParaRPr lang="en-US" sz="1200" dirty="0">
+                      <a:endParaRPr lang="en-US" sz="1400" dirty="0">
                         <a:latin typeface="Calibri" charset="0"/>
                         <a:ea typeface="Calibri" charset="0"/>
                         <a:cs typeface="Calibri" charset="0"/>
@@ -9548,7 +9824,7 @@
                         <a:buNone/>
                       </a:pPr>
                       <a:r>
-                        <a:rPr lang="en-US" sz="1200" dirty="0">
+                        <a:rPr lang="en-US" sz="1400" dirty="0">
                           <a:solidFill>
                             <a:srgbClr val="0F172A"/>
                           </a:solidFill>
@@ -9558,7 +9834,7 @@
                         </a:rPr>
                         <a:t>14 passed</a:t>
                       </a:r>
-                      <a:endParaRPr lang="en-US" sz="1200" dirty="0">
+                      <a:endParaRPr lang="en-US" sz="1400" dirty="0">
                         <a:latin typeface="Calibri" charset="0"/>
                         <a:ea typeface="Calibri" charset="0"/>
                         <a:cs typeface="Calibri" charset="0"/>
@@ -9618,7 +9894,7 @@
                         <a:buNone/>
                       </a:pPr>
                       <a:r>
-                        <a:rPr lang="en-US" sz="1200" dirty="0">
+                        <a:rPr lang="en-US" sz="1400" dirty="0">
                           <a:solidFill>
                             <a:srgbClr val="0F172A"/>
                           </a:solidFill>
@@ -9626,9 +9902,9 @@
                           <a:ea typeface="Calibri" pitchFamily="34" charset="-122"/>
                           <a:cs typeface="Calibri" pitchFamily="34" charset="-120"/>
                         </a:rPr>
-                        <a:t>Seed study, unlearning requests</a:t>
+                        <a:t>Load, 1 to 64 concurrent clients</a:t>
                       </a:r>
-                      <a:endParaRPr lang="en-US" sz="1200" dirty="0">
+                      <a:endParaRPr lang="en-US" sz="1400" dirty="0">
                         <a:latin typeface="Calibri" charset="0"/>
                         <a:ea typeface="Calibri" charset="0"/>
                         <a:cs typeface="Calibri" charset="0"/>
@@ -9686,7 +9962,7 @@
                         <a:buNone/>
                       </a:pPr>
                       <a:r>
-                        <a:rPr lang="en-US" sz="1200" dirty="0">
+                        <a:rPr lang="en-US" sz="1400" dirty="0">
                           <a:solidFill>
                             <a:srgbClr val="0F172A"/>
                           </a:solidFill>
@@ -9694,9 +9970,9 @@
                           <a:ea typeface="Calibri" pitchFamily="34" charset="-122"/>
                           <a:cs typeface="Calibri" pitchFamily="34" charset="-120"/>
                         </a:rPr>
-                        <a:t>250</a:t>
+                        <a:t>4 scenarios</a:t>
                       </a:r>
-                      <a:endParaRPr lang="en-US" sz="1200" dirty="0">
+                      <a:endParaRPr lang="en-US" sz="1400" dirty="0">
                         <a:latin typeface="Calibri" charset="0"/>
                         <a:ea typeface="Calibri" charset="0"/>
                         <a:cs typeface="Calibri" charset="0"/>
@@ -9754,7 +10030,7 @@
                         <a:buNone/>
                       </a:pPr>
                       <a:r>
-                        <a:rPr lang="en-US" sz="1200" dirty="0">
+                        <a:rPr lang="en-US" sz="1400" dirty="0">
                           <a:solidFill>
                             <a:srgbClr val="0F172A"/>
                           </a:solidFill>
@@ -9762,9 +10038,9 @@
                           <a:ea typeface="Calibri" pitchFamily="34" charset="-122"/>
                           <a:cs typeface="Calibri" pitchFamily="34" charset="-120"/>
                         </a:rPr>
-                        <a:t>250 certified</a:t>
+                        <a:t>errors only from 16 clients up</a:t>
                       </a:r>
-                      <a:endParaRPr lang="en-US" sz="1200" dirty="0">
+                      <a:endParaRPr lang="en-US" sz="1400" dirty="0">
                         <a:latin typeface="Calibri" charset="0"/>
                         <a:ea typeface="Calibri" charset="0"/>
                         <a:cs typeface="Calibri" charset="0"/>
@@ -9824,7 +10100,7 @@
                         <a:buNone/>
                       </a:pPr>
                       <a:r>
-                        <a:rPr lang="en-US" sz="1200" dirty="0">
+                        <a:rPr lang="en-US" sz="1400" dirty="0">
                           <a:solidFill>
                             <a:srgbClr val="0F172A"/>
                           </a:solidFill>
@@ -9832,9 +10108,9 @@
                           <a:ea typeface="Calibri" pitchFamily="34" charset="-122"/>
                           <a:cs typeface="Calibri" pitchFamily="34" charset="-120"/>
                         </a:rPr>
-                        <a:t>Audit tamper attacks</a:t>
+                        <a:t>Security probes</a:t>
                       </a:r>
-                      <a:endParaRPr lang="en-US" sz="1200" dirty="0">
+                      <a:endParaRPr lang="en-US" sz="1400" dirty="0">
                         <a:latin typeface="Calibri" charset="0"/>
                         <a:ea typeface="Calibri" charset="0"/>
                         <a:cs typeface="Calibri" charset="0"/>
@@ -9892,7 +10168,7 @@
                         <a:buNone/>
                       </a:pPr>
                       <a:r>
-                        <a:rPr lang="en-US" sz="1200" dirty="0">
+                        <a:rPr lang="en-US" sz="1400" dirty="0">
                           <a:solidFill>
                             <a:srgbClr val="0F172A"/>
                           </a:solidFill>
@@ -9900,9 +10176,9 @@
                           <a:ea typeface="Calibri" pitchFamily="34" charset="-122"/>
                           <a:cs typeface="Calibri" pitchFamily="34" charset="-120"/>
                         </a:rPr>
-                        <a:t>7</a:t>
+                        <a:t>58</a:t>
                       </a:r>
-                      <a:endParaRPr lang="en-US" sz="1200" dirty="0">
+                      <a:endParaRPr lang="en-US" sz="1400" dirty="0">
                         <a:latin typeface="Calibri" charset="0"/>
                         <a:ea typeface="Calibri" charset="0"/>
                         <a:cs typeface="Calibri" charset="0"/>
@@ -9960,7 +10236,7 @@
                         <a:buNone/>
                       </a:pPr>
                       <a:r>
-                        <a:rPr lang="en-US" sz="1200" dirty="0">
+                        <a:rPr lang="en-US" sz="1400" dirty="0">
                           <a:solidFill>
                             <a:srgbClr val="0F172A"/>
                           </a:solidFill>
@@ -9968,9 +10244,9 @@
                           <a:ea typeface="Calibri" pitchFamily="34" charset="-122"/>
                           <a:cs typeface="Calibri" pitchFamily="34" charset="-120"/>
                         </a:rPr>
-                        <a:t>4 detected, 3 not</a:t>
+                        <a:t>35 handled, 15 noted, 8 defects</a:t>
                       </a:r>
-                      <a:endParaRPr lang="en-US" sz="1200" dirty="0">
+                      <a:endParaRPr lang="en-US" sz="1400" dirty="0">
                         <a:latin typeface="Calibri" charset="0"/>
                         <a:ea typeface="Calibri" charset="0"/>
                         <a:cs typeface="Calibri" charset="0"/>
@@ -10030,7 +10306,7 @@
                         <a:buNone/>
                       </a:pPr>
                       <a:r>
-                        <a:rPr lang="en-US" sz="1200" dirty="0">
+                        <a:rPr lang="en-US" sz="1400" dirty="0">
                           <a:solidFill>
                             <a:srgbClr val="0F172A"/>
                           </a:solidFill>
@@ -10038,9 +10314,9 @@
                           <a:ea typeface="Calibri" pitchFamily="34" charset="-122"/>
                           <a:cs typeface="Calibri" pitchFamily="34" charset="-120"/>
                         </a:rPr>
-                        <a:t>API edge cases</a:t>
+                        <a:t>Scripted synthetic-user acceptance</a:t>
                       </a:r>
-                      <a:endParaRPr lang="en-US" sz="1200" dirty="0">
+                      <a:endParaRPr lang="en-US" sz="1400" dirty="0">
                         <a:latin typeface="Calibri" charset="0"/>
                         <a:ea typeface="Calibri" charset="0"/>
                         <a:cs typeface="Calibri" charset="0"/>
@@ -10098,7 +10374,7 @@
                         <a:buNone/>
                       </a:pPr>
                       <a:r>
-                        <a:rPr lang="en-US" sz="1200" dirty="0">
+                        <a:rPr lang="en-US" sz="1400" dirty="0">
                           <a:solidFill>
                             <a:srgbClr val="0F172A"/>
                           </a:solidFill>
@@ -10106,9 +10382,9 @@
                           <a:ea typeface="Calibri" pitchFamily="34" charset="-122"/>
                           <a:cs typeface="Calibri" pitchFamily="34" charset="-120"/>
                         </a:rPr>
-                        <a:t>20</a:t>
+                        <a:t>20 journeys</a:t>
                       </a:r>
-                      <a:endParaRPr lang="en-US" sz="1200" dirty="0">
+                      <a:endParaRPr lang="en-US" sz="1400" dirty="0">
                         <a:latin typeface="Calibri" charset="0"/>
                         <a:ea typeface="Calibri" charset="0"/>
                         <a:cs typeface="Calibri" charset="0"/>
@@ -10166,7 +10442,7 @@
                         <a:buNone/>
                       </a:pPr>
                       <a:r>
-                        <a:rPr lang="en-US" sz="1200" dirty="0">
+                        <a:rPr lang="en-US" sz="1400" dirty="0">
                           <a:solidFill>
                             <a:srgbClr val="0F172A"/>
                           </a:solidFill>
@@ -10174,9 +10450,215 @@
                           <a:ea typeface="Calibri" pitchFamily="34" charset="-122"/>
                           <a:cs typeface="Calibri" pitchFamily="34" charset="-120"/>
                         </a:rPr>
-                        <a:t>18 as intended, 2 not</a:t>
+                        <a:t>20 passed all steps</a:t>
                       </a:r>
-                      <a:endParaRPr lang="en-US" sz="1200" dirty="0">
+                      <a:endParaRPr lang="en-US" sz="1400" dirty="0">
+                        <a:latin typeface="Calibri" charset="0"/>
+                        <a:ea typeface="Calibri" charset="0"/>
+                        <a:cs typeface="Calibri" charset="0"/>
+                      </a:endParaRPr>
+                    </a:p>
+                  </a:txBody>
+                  <a:tcPr marL="76200" marR="76200" marT="38100" marB="38100" anchor="ctr">
+                    <a:lnL w="6350" cap="flat" cmpd="sng" algn="ctr">
+                      <a:solidFill>
+                        <a:srgbClr val="D5DCE6"/>
+                      </a:solidFill>
+                      <a:prstDash val="solid"/>
+                      <a:round/>
+                      <a:headEnd type="none" w="med" len="med"/>
+                      <a:tailEnd type="none" w="med" len="med"/>
+                    </a:lnL>
+                    <a:lnR w="6350" cap="flat" cmpd="sng" algn="ctr">
+                      <a:solidFill>
+                        <a:srgbClr val="D5DCE6"/>
+                      </a:solidFill>
+                      <a:prstDash val="solid"/>
+                      <a:round/>
+                      <a:headEnd type="none" w="med" len="med"/>
+                      <a:tailEnd type="none" w="med" len="med"/>
+                    </a:lnR>
+                    <a:lnT w="6350" cap="flat" cmpd="sng" algn="ctr">
+                      <a:solidFill>
+                        <a:srgbClr val="D5DCE6"/>
+                      </a:solidFill>
+                      <a:prstDash val="solid"/>
+                      <a:round/>
+                      <a:headEnd type="none" w="med" len="med"/>
+                      <a:tailEnd type="none" w="med" len="med"/>
+                    </a:lnT>
+                    <a:lnB w="6350" cap="flat" cmpd="sng" algn="ctr">
+                      <a:solidFill>
+                        <a:srgbClr val="D5DCE6"/>
+                      </a:solidFill>
+                      <a:prstDash val="solid"/>
+                      <a:round/>
+                      <a:headEnd type="none" w="med" len="med"/>
+                      <a:tailEnd type="none" w="med" len="med"/>
+                    </a:lnB>
+                    <a:solidFill>
+                      <a:srgbClr val="FFFFFF"/>
+                    </a:solidFill>
+                  </a:tcPr>
+                </a:tc>
+              </a:tr>
+              <a:tr h="502920">
+                <a:tc>
+                  <a:txBody>
+                    <a:bodyPr/>
+                    <a:lstStyle/>
+                    <a:p>
+                      <a:pPr indent="0" marL="0">
+                        <a:buNone/>
+                      </a:pPr>
+                      <a:r>
+                        <a:rPr lang="en-US" sz="1400" dirty="0">
+                          <a:solidFill>
+                            <a:srgbClr val="0F172A"/>
+                          </a:solidFill>
+                          <a:latin typeface="Calibri" pitchFamily="34" charset="0"/>
+                          <a:ea typeface="Calibri" pitchFamily="34" charset="-122"/>
+                          <a:cs typeface="Calibri" pitchFamily="34" charset="-120"/>
+                        </a:rPr>
+                        <a:t>Audit tamper attacks</a:t>
+                      </a:r>
+                      <a:endParaRPr lang="en-US" sz="1400" dirty="0">
+                        <a:latin typeface="Calibri" charset="0"/>
+                        <a:ea typeface="Calibri" charset="0"/>
+                        <a:cs typeface="Calibri" charset="0"/>
+                      </a:endParaRPr>
+                    </a:p>
+                  </a:txBody>
+                  <a:tcPr marL="76200" marR="76200" marT="38100" marB="38100" anchor="ctr">
+                    <a:lnL w="6350" cap="flat" cmpd="sng" algn="ctr">
+                      <a:solidFill>
+                        <a:srgbClr val="D5DCE6"/>
+                      </a:solidFill>
+                      <a:prstDash val="solid"/>
+                      <a:round/>
+                      <a:headEnd type="none" w="med" len="med"/>
+                      <a:tailEnd type="none" w="med" len="med"/>
+                    </a:lnL>
+                    <a:lnR w="6350" cap="flat" cmpd="sng" algn="ctr">
+                      <a:solidFill>
+                        <a:srgbClr val="D5DCE6"/>
+                      </a:solidFill>
+                      <a:prstDash val="solid"/>
+                      <a:round/>
+                      <a:headEnd type="none" w="med" len="med"/>
+                      <a:tailEnd type="none" w="med" len="med"/>
+                    </a:lnR>
+                    <a:lnT w="6350" cap="flat" cmpd="sng" algn="ctr">
+                      <a:solidFill>
+                        <a:srgbClr val="D5DCE6"/>
+                      </a:solidFill>
+                      <a:prstDash val="solid"/>
+                      <a:round/>
+                      <a:headEnd type="none" w="med" len="med"/>
+                      <a:tailEnd type="none" w="med" len="med"/>
+                    </a:lnT>
+                    <a:lnB w="6350" cap="flat" cmpd="sng" algn="ctr">
+                      <a:solidFill>
+                        <a:srgbClr val="D5DCE6"/>
+                      </a:solidFill>
+                      <a:prstDash val="solid"/>
+                      <a:round/>
+                      <a:headEnd type="none" w="med" len="med"/>
+                      <a:tailEnd type="none" w="med" len="med"/>
+                    </a:lnB>
+                    <a:solidFill>
+                      <a:srgbClr val="FFFFFF"/>
+                    </a:solidFill>
+                  </a:tcPr>
+                </a:tc>
+                <a:tc>
+                  <a:txBody>
+                    <a:bodyPr/>
+                    <a:lstStyle/>
+                    <a:p>
+                      <a:pPr indent="0" marL="0">
+                        <a:buNone/>
+                      </a:pPr>
+                      <a:r>
+                        <a:rPr lang="en-US" sz="1400" dirty="0">
+                          <a:solidFill>
+                            <a:srgbClr val="0F172A"/>
+                          </a:solidFill>
+                          <a:latin typeface="Calibri" pitchFamily="34" charset="0"/>
+                          <a:ea typeface="Calibri" pitchFamily="34" charset="-122"/>
+                          <a:cs typeface="Calibri" pitchFamily="34" charset="-120"/>
+                        </a:rPr>
+                        <a:t>7</a:t>
+                      </a:r>
+                      <a:endParaRPr lang="en-US" sz="1400" dirty="0">
+                        <a:latin typeface="Calibri" charset="0"/>
+                        <a:ea typeface="Calibri" charset="0"/>
+                        <a:cs typeface="Calibri" charset="0"/>
+                      </a:endParaRPr>
+                    </a:p>
+                  </a:txBody>
+                  <a:tcPr marL="76200" marR="76200" marT="38100" marB="38100" anchor="ctr">
+                    <a:lnL w="6350" cap="flat" cmpd="sng" algn="ctr">
+                      <a:solidFill>
+                        <a:srgbClr val="D5DCE6"/>
+                      </a:solidFill>
+                      <a:prstDash val="solid"/>
+                      <a:round/>
+                      <a:headEnd type="none" w="med" len="med"/>
+                      <a:tailEnd type="none" w="med" len="med"/>
+                    </a:lnL>
+                    <a:lnR w="6350" cap="flat" cmpd="sng" algn="ctr">
+                      <a:solidFill>
+                        <a:srgbClr val="D5DCE6"/>
+                      </a:solidFill>
+                      <a:prstDash val="solid"/>
+                      <a:round/>
+                      <a:headEnd type="none" w="med" len="med"/>
+                      <a:tailEnd type="none" w="med" len="med"/>
+                    </a:lnR>
+                    <a:lnT w="6350" cap="flat" cmpd="sng" algn="ctr">
+                      <a:solidFill>
+                        <a:srgbClr val="D5DCE6"/>
+                      </a:solidFill>
+                      <a:prstDash val="solid"/>
+                      <a:round/>
+                      <a:headEnd type="none" w="med" len="med"/>
+                      <a:tailEnd type="none" w="med" len="med"/>
+                    </a:lnT>
+                    <a:lnB w="6350" cap="flat" cmpd="sng" algn="ctr">
+                      <a:solidFill>
+                        <a:srgbClr val="D5DCE6"/>
+                      </a:solidFill>
+                      <a:prstDash val="solid"/>
+                      <a:round/>
+                      <a:headEnd type="none" w="med" len="med"/>
+                      <a:tailEnd type="none" w="med" len="med"/>
+                    </a:lnB>
+                    <a:solidFill>
+                      <a:srgbClr val="FFFFFF"/>
+                    </a:solidFill>
+                  </a:tcPr>
+                </a:tc>
+                <a:tc>
+                  <a:txBody>
+                    <a:bodyPr/>
+                    <a:lstStyle/>
+                    <a:p>
+                      <a:pPr indent="0" marL="0">
+                        <a:buNone/>
+                      </a:pPr>
+                      <a:r>
+                        <a:rPr lang="en-US" sz="1400" dirty="0">
+                          <a:solidFill>
+                            <a:srgbClr val="0F172A"/>
+                          </a:solidFill>
+                          <a:latin typeface="Calibri" pitchFamily="34" charset="0"/>
+                          <a:ea typeface="Calibri" pitchFamily="34" charset="-122"/>
+                          <a:cs typeface="Calibri" pitchFamily="34" charset="-120"/>
+                        </a:rPr>
+                        <a:t>4 detected, 3 not</a:t>
+                      </a:r>
+                      <a:endParaRPr lang="en-US" sz="1400" dirty="0">
                         <a:latin typeface="Calibri" charset="0"/>
                         <a:ea typeface="Calibri" charset="0"/>
                         <a:cs typeface="Calibri" charset="0"/>
@@ -10259,14 +10741,14 @@
               <a:buChar char="•"/>
             </a:pPr>
             <a:r>
-              <a:rPr lang="en-US" sz="1600" dirty="0">
+              <a:rPr lang="en-US" sz="1400" dirty="0">
                 <a:solidFill>
                   <a:srgbClr val="0F172A"/>
                 </a:solidFill>
               </a:rPr>
-              <a:t>Audit chain catches edits, deletions and re-ordering (4 of 7 attacks); tail truncation, a full re-hash forgery and an appended forged record pass.</a:t>
+              <a:t>Audit chain catches edits, deletions and re-ordering (4 of 7 attacks); tail truncation, a full re-hash forgery and an appended forged record pass, and an emptied ledger verifies as valid.</a:t>
             </a:r>
-            <a:endParaRPr lang="en-US" sz="1600" dirty="0"/>
+            <a:endParaRPr lang="en-US" sz="1400" dirty="0"/>
           </a:p>
           <a:p>
             <a:pPr marL="228600" indent="-228600">
@@ -10277,14 +10759,14 @@
               <a:buChar char="•"/>
             </a:pPr>
             <a:r>
-              <a:rPr lang="en-US" sz="1600" dirty="0">
+              <a:rPr lang="en-US" sz="1400" dirty="0">
                 <a:solidFill>
                   <a:srgbClr val="0F172A"/>
                 </a:solidFill>
               </a:rPr>
-              <a:t>API medians on 127.0.0.1: train 36 ms, unlearn 58 ms, state 21 ms.</a:t>
+              <a:t>Races: 32 simultaneous removals of one client gave 1 success and 31 refusals; 16 simultaneous trainings left a valid 16-record chain; a 2,000-request soak had 0 errors.</a:t>
             </a:r>
-            <a:endParaRPr lang="en-US" sz="1600" dirty="0"/>
+            <a:endParaRPr lang="en-US" sz="1400" dirty="0"/>
           </a:p>
           <a:p>
             <a:pPr marL="228600" indent="-228600">
@@ -10295,14 +10777,14 @@
               <a:buChar char="•"/>
             </a:pPr>
             <a:r>
-              <a:rPr lang="en-US" sz="1600" dirty="0">
+              <a:rPr lang="en-US" sz="1400" dirty="0">
                 <a:solidFill>
                   <a:srgbClr val="0F172A"/>
                 </a:solidFill>
               </a:rPr>
-              <a:t>A 2 MB body aborts the connection instead of a clean 400; PUT returns the stdlib HTML 501 page.</a:t>
+              <a:t>/api/state saturates near 86 requests/s because it re-reads the ledger; medians: train 36 ms, unlearn 58 ms.</a:t>
             </a:r>
-            <a:endParaRPr lang="en-US" sz="1600" dirty="0"/>
+            <a:endParaRPr lang="en-US" sz="1400" dirty="0"/>
           </a:p>
           <a:p>
             <a:pPr marL="228600" indent="-228600">
@@ -10313,14 +10795,14 @@
               <a:buChar char="•"/>
             </a:pPr>
             <a:r>
-              <a:rPr lang="en-US" sz="1600" dirty="0">
+              <a:rPr lang="en-US" sz="1400" dirty="0">
                 <a:solidFill>
                   <a:srgbClr val="0F172A"/>
                 </a:solidFill>
               </a:rPr>
-              <a:t>No authentication; one shared engine for all callers.</a:t>
+              <a:t>8 security defects (no read timeout, POST open to cross-site requests, Host unchecked, connection bursts refused, no authentication) are listed with their fixes under next steps.</a:t>
             </a:r>
-            <a:endParaRPr lang="en-US" sz="1600" dirty="0"/>
+            <a:endParaRPr lang="en-US" sz="1400" dirty="0"/>
           </a:p>
           <a:p>
             <a:pPr marL="228600" indent="-228600">
@@ -10331,14 +10813,14 @@
               <a:buChar char="•"/>
             </a:pPr>
             <a:r>
-              <a:rPr lang="en-US" sz="1600" dirty="0">
+              <a:rPr lang="en-US" sz="1400" dirty="0">
                 <a:solidFill>
                   <a:srgbClr val="0F172A"/>
                 </a:solidFill>
               </a:rPr>
-              <a:t>Not done: load, security and user-acceptance testing.</a:t>
+              <a:t>Acceptance is scripted (49 certificates checked, 0 console errors), not a human study.</a:t>
             </a:r>
-            <a:endParaRPr lang="en-US" sz="1600" dirty="0"/>
+            <a:endParaRPr lang="en-US" sz="1400" dirty="0"/>
           </a:p>
         </p:txBody>
       </p:sp>
@@ -10928,14 +11410,14 @@
               <a:buNone/>
             </a:pPr>
             <a:r>
-              <a:rPr lang="en-US" sz="1400" dirty="0">
+              <a:rPr lang="en-US" sz="1300" dirty="0">
                 <a:solidFill>
                   <a:srgbClr val="475569"/>
                 </a:solidFill>
               </a:rPr>
-              <a:t>Reported epsilon 1.61 exceeds 1; the bound needs sigma above 4.845. Useful models need sigma 0.1 or less (epsilon 48 or more).</a:t>
+              <a:t>Reported epsilon 1.61 exceeds 1; the bound needs sigma above 4.845. With 5 clients a useful model needs sigma 0.1 or less; with about 1,000 clients sigma 4.85 works.</a:t>
             </a:r>
-            <a:endParaRPr lang="en-US" sz="1400" dirty="0"/>
+            <a:endParaRPr lang="en-US" sz="1300" dirty="0"/>
           </a:p>
         </p:txBody>
       </p:sp>
@@ -11055,7 +11537,7 @@
                   <a:srgbClr val="0F172A"/>
                 </a:solidFill>
               </a:rPr>
-              <a:t>Attack has no signal</a:t>
+              <a:t>Clip norm C = 25 is 50x too small</a:t>
             </a:r>
             <a:endParaRPr lang="en-US" sz="1500" dirty="0"/>
           </a:p>
@@ -11094,7 +11576,7 @@
                   <a:srgbClr val="475569"/>
                 </a:solidFill>
               </a:rPr>
-              <a:t>AUC 0.52 +/- 0.22 before removal at the default noise; 0.99 to 0.54 without noise.</a:t>
+              <a:t>At 200 sentences per client raw norms are about 1,239; C = 25 scales them by 0.02. The studies set C to the median raw norm.</a:t>
             </a:r>
             <a:endParaRPr lang="en-US" sz="1400" dirty="0"/>
           </a:p>
@@ -11250,14 +11732,14 @@
               <a:buNone/>
             </a:pPr>
             <a:r>
-              <a:rPr lang="en-US" sz="1400" dirty="0">
+              <a:rPr lang="en-US" sz="1300" dirty="0">
                 <a:solidFill>
                   <a:srgbClr val="475569"/>
                 </a:solidFill>
               </a:rPr>
-              <a:t>4 of 7 attacks detected; truncation, re-hash forgery and forged append are not (no signature).</a:t>
+              <a:t>4 of 7 attacks detected; truncation, re-hash forgery and forged append are not; an emptied ledger verifies; one garbage line makes /api/state return 500.</a:t>
             </a:r>
-            <a:endParaRPr lang="en-US" sz="1400" dirty="0"/>
+            <a:endParaRPr lang="en-US" sz="1300" dirty="0"/>
           </a:p>
         </p:txBody>
       </p:sp>
@@ -11377,7 +11859,7 @@
                   <a:srgbClr val="0F172A"/>
                 </a:solidFill>
               </a:rPr>
-              <a:t>API robustness</a:t>
+              <a:t>API hardening</a:t>
             </a:r>
             <a:endParaRPr lang="en-US" sz="1500" dirty="0"/>
           </a:p>
@@ -11416,7 +11898,7 @@
                   <a:srgbClr val="475569"/>
                 </a:solidFill>
               </a:rPr>
-              <a:t>Oversized body aborts the connection; PUT gives an HTML 501 page; no authentication on any route.</a:t>
+              <a:t>8 defects in 58 probes: no read timeout, cross-site POST accepted, Host unchecked, connection bursts refused, no authentication.</a:t>
             </a:r>
             <a:endParaRPr lang="en-US" sz="1400" dirty="0"/>
           </a:p>
@@ -11920,14 +12402,14 @@
               <a:buChar char="•"/>
             </a:pPr>
             <a:r>
-              <a:rPr lang="en-US" sz="1600" dirty="0">
+              <a:rPr lang="en-US" sz="1500" dirty="0">
                 <a:solidFill>
                   <a:srgbClr val="0F172A"/>
                 </a:solidFill>
               </a:rPr>
-              <a:t>Report an independent fresh-noise retrain comparison in the certificate next to the same-noise recomputation.</a:t>
+              <a:t>Put the fresh-noise retrain comparison in the certificate next to the same-noise recomputation, and re-draw the noise per release.</a:t>
             </a:r>
-            <a:endParaRPr lang="en-US" sz="1600" dirty="0"/>
+            <a:endParaRPr lang="en-US" sz="1500" dirty="0"/>
           </a:p>
           <a:p>
             <a:pPr marL="228600" indent="-228600">
@@ -11938,14 +12420,14 @@
               <a:buChar char="•"/>
             </a:pPr>
             <a:r>
-              <a:rPr lang="en-US" sz="1600" dirty="0">
+              <a:rPr lang="en-US" sz="1500" dirty="0">
                 <a:solidFill>
                   <a:srgbClr val="0F172A"/>
                 </a:solidFill>
               </a:rPr>
-              <a:t>Add a privacy accountant, account for or re-draw the noise after unlearning, and use a calibrated Gaussian bound that is valid for epsilon above 1 [19].</a:t>
+              <a:t>Add a privacy accountant and the exact analytic Gaussian bound [19] (it gives epsilon 1.27 at sigma 3, not 1.61); plan federations of about 1,000 clients for epsilon below 1.</a:t>
             </a:r>
-            <a:endParaRPr lang="en-US" sz="1600" dirty="0"/>
+            <a:endParaRPr lang="en-US" sz="1500" dirty="0"/>
           </a:p>
           <a:p>
             <a:pPr marL="228600" indent="-228600">
@@ -11956,14 +12438,14 @@
               <a:buChar char="•"/>
             </a:pPr>
             <a:r>
-              <a:rPr lang="en-US" sz="1600" dirty="0">
+              <a:rPr lang="en-US" sz="1500" dirty="0">
                 <a:solidFill>
                   <a:srgbClr val="0F172A"/>
                 </a:solidFill>
               </a:rPr>
-              <a:t>Sign or anchor ledger records, authenticate requests and return a clean 400 for oversized bodies.</a:t>
+              <a:t>Harden: sign or anchor ledger records, authenticate and CSRF-protect the API, add read timeouts, reject an emptied ledger and return a clean 400 for oversized bodies.</a:t>
             </a:r>
-            <a:endParaRPr lang="en-US" sz="1600" dirty="0"/>
+            <a:endParaRPr lang="en-US" sz="1500" dirty="0"/>
           </a:p>
           <a:p>
             <a:pPr marL="228600" indent="-228600">
@@ -11974,14 +12456,14 @@
               <a:buChar char="•"/>
             </a:pPr>
             <a:r>
-              <a:rPr lang="en-US" sz="1600" dirty="0">
+              <a:rPr lang="en-US" sz="1500" dirty="0">
                 <a:solidFill>
                   <a:srgbClr val="0F172A"/>
                 </a:solidFill>
               </a:rPr>
-              <a:t>Complete the final report and demonstration; a LoRA adapter on a small LLM remains future work.</a:t>
+              <a:t>Complete the final report and demonstration; extend the adapter study to LoRA on a small pretrained language model with Flower.</a:t>
             </a:r>
-            <a:endParaRPr lang="en-US" sz="1600" dirty="0"/>
+            <a:endParaRPr lang="en-US" sz="1500" dirty="0"/>
           </a:p>
         </p:txBody>
       </p:sp>
@@ -14615,7 +15097,7 @@
                   <a:srgbClr val="0F172A"/>
                 </a:solidFill>
               </a:rPr>
-              <a:t>Model: character-bigram language model, 1,089 parameters, a proxy for an LLM adapter update.</a:t>
+              <a:t>Model: character-bigram LM (1,089 parameters) in the product; a 137,151-parameter GRU with LoRA-style adapters in the neural study.</a:t>
             </a:r>
             <a:endParaRPr lang="en-US" sz="1400" dirty="0"/>
           </a:p>
@@ -15738,7 +16220,7 @@
                   <a:srgbClr val="475569"/>
                 </a:solidFill>
               </a:rPr>
-              <a:t>Fixed seed 2026; scripts/run_experiments.py regenerates experiments/*/metrics.json.</a:t>
+              <a:t>Fixed seeds; four run_*.py scripts regenerate every experiments/*/metrics.json (product, synthetic corpus, neural, testing).</a:t>
             </a:r>
             <a:endParaRPr lang="en-US" sz="1500" dirty="0"/>
           </a:p>
@@ -15897,8 +16379,8 @@
             <a:tbl>
               <a:tblPr/>
               <a:tblGrid>
-                <a:gridCol w="1516989"/>
-                <a:gridCol w="2123785"/>
+                <a:gridCol w="1314724"/>
+                <a:gridCol w="2326050"/>
                 <a:gridCol w="1415856"/>
               </a:tblGrid>
               <a:tr h="566928">
@@ -15919,7 +16401,7 @@
                           <a:ea typeface="Calibri" pitchFamily="34" charset="-122"/>
                           <a:cs typeface="Calibri" pitchFamily="34" charset="-120"/>
                         </a:rPr>
-                        <a:t>Set</a:t>
+                        <a:t>Source (all synthetic)</a:t>
                       </a:r>
                       <a:endParaRPr lang="en-US" sz="1200" dirty="0">
                         <a:latin typeface="Calibri" charset="0"/>
@@ -16125,7 +16607,7 @@
                           <a:ea typeface="Calibri" pitchFamily="34" charset="-122"/>
                           <a:cs typeface="Calibri" pitchFamily="34" charset="-120"/>
                         </a:rPr>
-                        <a:t>Client corpora</a:t>
+                        <a:t>Product corpus</a:t>
                       </a:r>
                       <a:endParaRPr lang="en-US" sz="1200" dirty="0">
                         <a:latin typeface="Calibri" charset="0"/>
@@ -16193,7 +16675,7 @@
                           <a:ea typeface="Calibri" pitchFamily="34" charset="-122"/>
                           <a:cs typeface="Calibri" pitchFamily="34" charset="-120"/>
                         </a:rPr>
-                        <a:t>5 clients x 5 sentences (25 records)</a:t>
+                        <a:t>5 clients x 5 sentences (25 records); 5 public + 5 non-member</a:t>
                       </a:r>
                       <a:endParaRPr lang="en-US" sz="1200" dirty="0">
                         <a:latin typeface="Calibri" charset="0"/>
@@ -16261,7 +16743,7 @@
                           <a:ea typeface="Calibri" pitchFamily="34" charset="-122"/>
                           <a:cs typeface="Calibri" pitchFamily="34" charset="-120"/>
                         </a:rPr>
-                        <a:t>Federated training</a:t>
+                        <a:t>The app: training and removal</a:t>
                       </a:r>
                       <a:endParaRPr lang="en-US" sz="1200" dirty="0">
                         <a:latin typeface="Calibri" charset="0"/>
@@ -16331,7 +16813,7 @@
                           <a:ea typeface="Calibri" pitchFamily="34" charset="-122"/>
                           <a:cs typeface="Calibri" pitchFamily="34" charset="-120"/>
                         </a:rPr>
-                        <a:t>Public evaluation</a:t>
+                        <a:t>Synthetic-corpus study</a:t>
                       </a:r>
                       <a:endParaRPr lang="en-US" sz="1200" dirty="0">
                         <a:latin typeface="Calibri" charset="0"/>
@@ -16399,7 +16881,7 @@
                           <a:ea typeface="Calibri" pitchFamily="34" charset="-122"/>
                           <a:cs typeface="Calibri" pitchFamily="34" charset="-120"/>
                         </a:rPr>
-                        <a:t>5 sentences</a:t>
+                        <a:t>20 domains x 200 train / 200 held-out; 300 public</a:t>
                       </a:r>
                       <a:endParaRPr lang="en-US" sz="1200" dirty="0">
                         <a:latin typeface="Calibri" charset="0"/>
@@ -16467,7 +16949,7 @@
                           <a:ea typeface="Calibri" pitchFamily="34" charset="-122"/>
                           <a:cs typeface="Calibri" pitchFamily="34" charset="-120"/>
                         </a:rPr>
-                        <a:t>Perplexity, accuracy, utility</a:t>
+                        <a:t>Real engine at realistic size</a:t>
                       </a:r>
                       <a:endParaRPr lang="en-US" sz="1200" dirty="0">
                         <a:latin typeface="Calibri" charset="0"/>
@@ -16537,7 +17019,7 @@
                           <a:ea typeface="Calibri" pitchFamily="34" charset="-122"/>
                           <a:cs typeface="Calibri" pitchFamily="34" charset="-120"/>
                         </a:rPr>
-                        <a:t>Non-member texts</a:t>
+                        <a:t>Neural-study corpus</a:t>
                       </a:r>
                       <a:endParaRPr lang="en-US" sz="1200" dirty="0">
                         <a:latin typeface="Calibri" charset="0"/>
@@ -16605,7 +17087,7 @@
                           <a:ea typeface="Calibri" pitchFamily="34" charset="-122"/>
                           <a:cs typeface="Calibri" pitchFamily="34" charset="-120"/>
                         </a:rPr>
-                        <a:t>5 sentences</a:t>
+                        <a:t>8 domains x 150 train / 150 held-out; 6,000 public</a:t>
                       </a:r>
                       <a:endParaRPr lang="en-US" sz="1200" dirty="0">
                         <a:latin typeface="Calibri" charset="0"/>
@@ -16673,7 +17155,7 @@
                           <a:ea typeface="Calibri" pitchFamily="34" charset="-122"/>
                           <a:cs typeface="Calibri" pitchFamily="34" charset="-120"/>
                         </a:rPr>
-                        <a:t>Membership-attack baseline</a:t>
+                        <a:t>GRU + LoRA-style adapters</a:t>
                       </a:r>
                       <a:endParaRPr lang="en-US" sz="1200" dirty="0">
                         <a:latin typeface="Calibri" charset="0"/>
@@ -16743,7 +17225,7 @@
                           <a:ea typeface="Calibri" pitchFamily="34" charset="-122"/>
                           <a:cs typeface="Calibri" pitchFamily="34" charset="-120"/>
                         </a:rPr>
-                        <a:t>Alphabet and parameters</a:t>
+                        <a:t>Bigram parameters</a:t>
                       </a:r>
                       <a:endParaRPr lang="en-US" sz="1200" dirty="0">
                         <a:latin typeface="Calibri" charset="0"/>
@@ -17017,7 +17499,7 @@
                           <a:ea typeface="Calibri" pitchFamily="34" charset="-122"/>
                           <a:cs typeface="Calibri" pitchFamily="34" charset="-120"/>
                         </a:rPr>
-                        <a:t>None; hand-written, offline</a:t>
+                        <a:t>None: seeded grammars, offline</a:t>
                       </a:r>
                       <a:endParaRPr lang="en-US" sz="1200" dirty="0">
                         <a:latin typeface="Calibri" charset="0"/>
@@ -17085,7 +17567,7 @@
                           <a:ea typeface="Calibri" pitchFamily="34" charset="-122"/>
                           <a:cs typeface="Calibri" pitchFamily="34" charset="-120"/>
                         </a:rPr>
-                        <a:t>No licence issue; no real corpus</a:t>
+                        <a:t>No licence issue</a:t>
                       </a:r>
                       <a:endParaRPr lang="en-US" sz="1200" dirty="0">
                         <a:latin typeface="Calibri" charset="0"/>
@@ -17727,14 +18209,14 @@
               <a:buNone/>
             </a:pPr>
             <a:r>
-              <a:rPr lang="en-US" sz="1500" dirty="0">
+              <a:rPr lang="en-US" sz="1400" dirty="0">
                 <a:solidFill>
                   <a:srgbClr val="475569"/>
                 </a:solidFill>
               </a:rPr>
-              <a:t>Each vector is scaled to norm at most C = 25 (scales 0.886 to 0.991). Gaussian noise with std sigma x C = 75 (sigma = 3) is added to every coordinate of the sum.</a:t>
+              <a:t>Each vector is scaled to norm at most C. Product: C = 25 (scales 0.886 to 0.991). At realistic size raw norms are about 1,239, so C = 25 would shrink updates 50x: the studies use C = median raw norm. Noise std = sigma x C per coordinate.</a:t>
             </a:r>
-            <a:endParaRPr lang="en-US" sz="1500" dirty="0"/>
+            <a:endParaRPr lang="en-US" sz="1400" dirty="0"/>
           </a:p>
         </p:txBody>
       </p:sp>
@@ -17888,7 +18370,7 @@
                         <a:buNone/>
                       </a:pPr>
                       <a:r>
-                        <a:rPr lang="en-US" sz="1200" b="1" dirty="0">
+                        <a:rPr lang="en-US" sz="1100" b="1" dirty="0">
                           <a:solidFill>
                             <a:srgbClr val="FFFFFF"/>
                           </a:solidFill>
@@ -17898,7 +18380,7 @@
                         </a:rPr>
                         <a:t>Component</a:t>
                       </a:r>
-                      <a:endParaRPr lang="en-US" sz="1200" dirty="0">
+                      <a:endParaRPr lang="en-US" sz="1100" dirty="0">
                         <a:latin typeface="Calibri" charset="0"/>
                         <a:ea typeface="Calibri" charset="0"/>
                         <a:cs typeface="Calibri" charset="0"/>
@@ -17956,7 +18438,7 @@
                         <a:buNone/>
                       </a:pPr>
                       <a:r>
-                        <a:rPr lang="en-US" sz="1200" b="1" dirty="0">
+                        <a:rPr lang="en-US" sz="1100" b="1" dirty="0">
                           <a:solidFill>
                             <a:srgbClr val="FFFFFF"/>
                           </a:solidFill>
@@ -17966,7 +18448,7 @@
                         </a:rPr>
                         <a:t>Detail</a:t>
                       </a:r>
-                      <a:endParaRPr lang="en-US" sz="1200" dirty="0">
+                      <a:endParaRPr lang="en-US" sz="1100" dirty="0">
                         <a:latin typeface="Calibri" charset="0"/>
                         <a:ea typeface="Calibri" charset="0"/>
                         <a:cs typeface="Calibri" charset="0"/>
@@ -18026,7 +18508,7 @@
                         <a:buNone/>
                       </a:pPr>
                       <a:r>
-                        <a:rPr lang="en-US" sz="1200" dirty="0">
+                        <a:rPr lang="en-US" sz="1100" dirty="0">
                           <a:solidFill>
                             <a:srgbClr val="0F172A"/>
                           </a:solidFill>
@@ -18034,9 +18516,9 @@
                           <a:ea typeface="Calibri" pitchFamily="34" charset="-122"/>
                           <a:cs typeface="Calibri" pitchFamily="34" charset="-120"/>
                         </a:rPr>
-                        <a:t>Model</a:t>
+                        <a:t>Product model</a:t>
                       </a:r>
-                      <a:endParaRPr lang="en-US" sz="1200" dirty="0">
+                      <a:endParaRPr lang="en-US" sz="1100" dirty="0">
                         <a:latin typeface="Calibri" charset="0"/>
                         <a:ea typeface="Calibri" charset="0"/>
                         <a:cs typeface="Calibri" charset="0"/>
@@ -18094,7 +18576,7 @@
                         <a:buNone/>
                       </a:pPr>
                       <a:r>
-                        <a:rPr lang="en-US" sz="1200" dirty="0">
+                        <a:rPr lang="en-US" sz="1100" dirty="0">
                           <a:solidFill>
                             <a:srgbClr val="0F172A"/>
                           </a:solidFill>
@@ -18102,9 +18584,9 @@
                           <a:ea typeface="Calibri" pitchFamily="34" charset="-122"/>
                           <a:cs typeface="Calibri" pitchFamily="34" charset="-120"/>
                         </a:rPr>
-                        <a:t>Character-bigram LM</a:t>
+                        <a:t>Character-bigram LM, 1,089 parameters (33 x 33), pure Python</a:t>
                       </a:r>
-                      <a:endParaRPr lang="en-US" sz="1200" dirty="0">
+                      <a:endParaRPr lang="en-US" sz="1100" dirty="0">
                         <a:latin typeface="Calibri" charset="0"/>
                         <a:ea typeface="Calibri" charset="0"/>
                         <a:cs typeface="Calibri" charset="0"/>
@@ -18164,7 +18646,7 @@
                         <a:buNone/>
                       </a:pPr>
                       <a:r>
-                        <a:rPr lang="en-US" sz="1200" dirty="0">
+                        <a:rPr lang="en-US" sz="1100" dirty="0">
                           <a:solidFill>
                             <a:srgbClr val="0F172A"/>
                           </a:solidFill>
@@ -18172,9 +18654,9 @@
                           <a:ea typeface="Calibri" pitchFamily="34" charset="-122"/>
                           <a:cs typeface="Calibri" pitchFamily="34" charset="-120"/>
                         </a:rPr>
-                        <a:t>Parameters</a:t>
+                        <a:t>Neural study</a:t>
                       </a:r>
-                      <a:endParaRPr lang="en-US" sz="1200" dirty="0">
+                      <a:endParaRPr lang="en-US" sz="1100" dirty="0">
                         <a:latin typeface="Calibri" charset="0"/>
                         <a:ea typeface="Calibri" charset="0"/>
                         <a:cs typeface="Calibri" charset="0"/>
@@ -18232,7 +18714,7 @@
                         <a:buNone/>
                       </a:pPr>
                       <a:r>
-                        <a:rPr lang="en-US" sz="1200" dirty="0">
+                        <a:rPr lang="en-US" sz="1100" dirty="0">
                           <a:solidFill>
                             <a:srgbClr val="0F172A"/>
                           </a:solidFill>
@@ -18240,9 +18722,9 @@
                           <a:ea typeface="Calibri" pitchFamily="34" charset="-122"/>
                           <a:cs typeface="Calibri" pitchFamily="34" charset="-120"/>
                         </a:rPr>
-                        <a:t>1,089 (33 x 33)</a:t>
+                        <a:t>GRU 137,151 parameters, frozen</a:t>
                       </a:r>
-                      <a:endParaRPr lang="en-US" sz="1200" dirty="0">
+                      <a:endParaRPr lang="en-US" sz="1100" dirty="0">
                         <a:latin typeface="Calibri" charset="0"/>
                         <a:ea typeface="Calibri" charset="0"/>
                         <a:cs typeface="Calibri" charset="0"/>
@@ -18302,7 +18784,7 @@
                         <a:buNone/>
                       </a:pPr>
                       <a:r>
-                        <a:rPr lang="en-US" sz="1200" dirty="0">
+                        <a:rPr lang="en-US" sz="1100" dirty="0">
                           <a:solidFill>
                             <a:srgbClr val="0F172A"/>
                           </a:solidFill>
@@ -18310,9 +18792,9 @@
                           <a:ea typeface="Calibri" pitchFamily="34" charset="-122"/>
                           <a:cs typeface="Calibri" pitchFamily="34" charset="-120"/>
                         </a:rPr>
-                        <a:t>Smoothing</a:t>
+                        <a:t>Adapter per client</a:t>
                       </a:r>
-                      <a:endParaRPr lang="en-US" sz="1200" dirty="0">
+                      <a:endParaRPr lang="en-US" sz="1100" dirty="0">
                         <a:latin typeface="Calibri" charset="0"/>
                         <a:ea typeface="Calibri" charset="0"/>
                         <a:cs typeface="Calibri" charset="0"/>
@@ -18370,7 +18852,7 @@
                         <a:buNone/>
                       </a:pPr>
                       <a:r>
-                        <a:rPr lang="en-US" sz="1200" dirty="0">
+                        <a:rPr lang="en-US" sz="1100" dirty="0">
                           <a:solidFill>
                             <a:srgbClr val="0F172A"/>
                           </a:solidFill>
@@ -18378,9 +18860,9 @@
                           <a:ea typeface="Calibri" pitchFamily="34" charset="-122"/>
                           <a:cs typeface="Calibri" pitchFamily="34" charset="-120"/>
                         </a:rPr>
-                        <a:t>0.15 on non-negative values</a:t>
+                        <a:t>rank 64, 14,272 parameters</a:t>
                       </a:r>
-                      <a:endParaRPr lang="en-US" sz="1200" dirty="0">
+                      <a:endParaRPr lang="en-US" sz="1100" dirty="0">
                         <a:latin typeface="Calibri" charset="0"/>
                         <a:ea typeface="Calibri" charset="0"/>
                         <a:cs typeface="Calibri" charset="0"/>
@@ -18440,7 +18922,7 @@
                         <a:buNone/>
                       </a:pPr>
                       <a:r>
-                        <a:rPr lang="en-US" sz="1200" dirty="0">
+                        <a:rPr lang="en-US" sz="1100" dirty="0">
                           <a:solidFill>
                             <a:srgbClr val="0F172A"/>
                           </a:solidFill>
@@ -18450,7 +18932,7 @@
                         </a:rPr>
                         <a:t>Release</a:t>
                       </a:r>
-                      <a:endParaRPr lang="en-US" sz="1200" dirty="0">
+                      <a:endParaRPr lang="en-US" sz="1100" dirty="0">
                         <a:latin typeface="Calibri" charset="0"/>
                         <a:ea typeface="Calibri" charset="0"/>
                         <a:cs typeface="Calibri" charset="0"/>
@@ -18508,7 +18990,7 @@
                         <a:buNone/>
                       </a:pPr>
                       <a:r>
-                        <a:rPr lang="en-US" sz="1200" dirty="0">
+                        <a:rPr lang="en-US" sz="1100" dirty="0">
                           <a:solidFill>
                             <a:srgbClr val="0F172A"/>
                           </a:solidFill>
@@ -18516,9 +18998,9 @@
                           <a:ea typeface="Calibri" pitchFamily="34" charset="-122"/>
                           <a:cs typeface="Calibri" pitchFamily="34" charset="-120"/>
                         </a:rPr>
-                        <a:t>(sum + noise) / n</a:t>
+                        <a:t>(sum + noise) / n, same for both</a:t>
                       </a:r>
-                      <a:endParaRPr lang="en-US" sz="1200" dirty="0">
+                      <a:endParaRPr lang="en-US" sz="1100" dirty="0">
                         <a:latin typeface="Calibri" charset="0"/>
                         <a:ea typeface="Calibri" charset="0"/>
                         <a:cs typeface="Calibri" charset="0"/>
@@ -18602,7 +19084,7 @@
                   <a:srgbClr val="64748B"/>
                 </a:solidFill>
               </a:rPr>
-              <a:t>A proxy for an LLM adapter update; pure Python, no neural network, no GPU.</a:t>
+              <a:t>Product: bigram parameter vector as the adapter update. Neural study: PyTorch GRU with LoRA-style adapters on synthetic text, CPU only.</a:t>
             </a:r>
             <a:endParaRPr lang="en-US" sz="1100" dirty="0"/>
           </a:p>
@@ -18996,7 +19478,7 @@
                           <a:ea typeface="Calibri" pitchFamily="34" charset="-122"/>
                           <a:cs typeface="Calibri" pitchFamily="34" charset="-120"/>
                         </a:rPr>
-                        <a:t>5 (Finance, Healthcare, Education, Retail, Travel)</a:t>
+                        <a:t>5 in the product; 5-20 and 8 in the studies</a:t>
                       </a:r>
                       <a:endParaRPr lang="en-US" sz="1300" dirty="0">
                         <a:latin typeface="Calibri" charset="0"/>
@@ -19134,7 +19616,7 @@
                           <a:ea typeface="Calibri" pitchFamily="34" charset="-122"/>
                           <a:cs typeface="Calibri" pitchFamily="34" charset="-120"/>
                         </a:rPr>
-                        <a:t>25</a:t>
+                        <a:t>25 in the product; median raw norm in the studies</a:t>
                       </a:r>
                       <a:endParaRPr lang="en-US" sz="1300" dirty="0">
                         <a:latin typeface="Calibri" charset="0"/>
@@ -19272,7 +19754,7 @@
                           <a:ea typeface="Calibri" pitchFamily="34" charset="-122"/>
                           <a:cs typeface="Calibri" pitchFamily="34" charset="-120"/>
                         </a:rPr>
-                        <a:t>3 (std 75 per coordinate)</a:t>
+                        <a:t>3 (std 75 per coordinate); sweeps 0 to 10</a:t>
                       </a:r>
                       <a:endParaRPr lang="en-US" sz="1300" dirty="0">
                         <a:latin typeface="Calibri" charset="0"/>
@@ -19548,7 +20030,7 @@
                           <a:ea typeface="Calibri" pitchFamily="34" charset="-122"/>
                           <a:cs typeface="Calibri" pitchFamily="34" charset="-120"/>
                         </a:rPr>
-                        <a:t>1.6149</a:t>
+                        <a:t>1.6149 at sigma 3</a:t>
                       </a:r>
                       <a:endParaRPr lang="en-US" sz="1300" dirty="0">
                         <a:latin typeface="Calibri" charset="0"/>
@@ -19618,7 +20100,7 @@
                           <a:ea typeface="Calibri" pitchFamily="34" charset="-122"/>
                           <a:cs typeface="Calibri" pitchFamily="34" charset="-120"/>
                         </a:rPr>
-                        <a:t>Random seed</a:t>
+                        <a:t>Seeds</a:t>
                       </a:r>
                       <a:endParaRPr lang="en-US" sz="1300" dirty="0">
                         <a:latin typeface="Calibri" charset="0"/>
@@ -19686,7 +20168,7 @@
                           <a:ea typeface="Calibri" pitchFamily="34" charset="-122"/>
                           <a:cs typeface="Calibri" pitchFamily="34" charset="-120"/>
                         </a:rPr>
-                        <a:t>2026</a:t>
+                        <a:t>2026 (product); 5 to 50 seeds per study</a:t>
                       </a:r>
                       <a:endParaRPr lang="en-US" sz="1300" dirty="0">
                         <a:latin typeface="Calibri" charset="0"/>
@@ -19888,8 +20370,8 @@
         </p:nvSpPr>
         <p:spPr>
           <a:xfrm>
-            <a:off x="6400800" y="1758186"/>
-            <a:ext cx="5238750" cy="3151127"/>
+            <a:off x="6400800" y="1924592"/>
+            <a:ext cx="5238750" cy="2818314"/>
           </a:xfrm>
           <a:prstGeom prst="rect">
             <a:avLst/>
@@ -19914,7 +20396,7 @@
         </p:nvSpPr>
         <p:spPr>
           <a:xfrm>
-            <a:off x="6400800" y="5004563"/>
+            <a:off x="6400800" y="4838156"/>
             <a:ext cx="5239512" cy="274320"/>
           </a:xfrm>
           <a:prstGeom prst="rect">
@@ -19936,7 +20418,7 @@
                   <a:srgbClr val="64748B"/>
                 </a:solidFill>
               </a:rPr>
-              <a:t>Reported epsilon against perplexity for 12 noise settings (20 seeds each)</a:t>
+              <a:t>Synthetic corpus: perplexity relative to the noise-free model against federation size; sigma 4.85 (epsilon 1.00) needs about 1,000 clients to come within 1.2x</a:t>
             </a:r>
             <a:endParaRPr lang="en-US" sz="1100" dirty="0"/>
           </a:p>
@@ -19992,7 +20474,7 @@
       </p:sp>
       <p:pic>
         <p:nvPicPr>
-          <p:cNvPr id="26" name="Privacy-utility chart" descr="Privacy-utility chart"/>
+          <p:cNvPr id="26" name="Federation-size chart" descr="Federation-size chart"/>
           <p:cNvPicPr>
             <a:picLocks noChangeAspect="1"/>
           </p:cNvPicPr>
@@ -20006,8 +20488,8 @@
         </p:blipFill>
         <p:spPr>
           <a:xfrm>
-            <a:off x="6400800" y="1758186"/>
-            <a:ext cx="5238750" cy="3151127"/>
+            <a:off x="6400800" y="1924592"/>
+            <a:ext cx="5238750" cy="2818314"/>
           </a:xfrm>
           <a:prstGeom prst="rect">
             <a:avLst/>
